--- a/PowerPoints/08 - Abstract Syntax Trees.pptx
+++ b/PowerPoints/08 - Abstract Syntax Trees.pptx
@@ -7962,18 +7962,31 @@
           <a:p>
             <a:r>
               <a:rPr lang="en-US" dirty="0"/>
-              <a:t>All AST classes will be defined in package “</a:t>
+              <a:t>All AST classes will be defined in package </a:t>
             </a:r>
             <a:r>
               <a:rPr lang="en-US" dirty="0" err="1">
                 <a:latin typeface="Consolas" pitchFamily="49" charset="0"/>
               </a:rPr>
-              <a:t>edu.citadel.cprl.ast</a:t>
-            </a:r>
-            <a:r>
-              <a:rPr lang="en-US" dirty="0"/>
-              <a:t>”.</a:t>
-            </a:r>
+              <a:t>edu.citadel.cprl</a:t>
+            </a:r>
+            <a:r>
+              <a:rPr lang="en-US" err="1">
+                <a:latin typeface="Consolas" pitchFamily="49" charset="0"/>
+              </a:rPr>
+              <a:t>.</a:t>
+            </a:r>
+            <a:r>
+              <a:rPr lang="en-US">
+                <a:latin typeface="Consolas" pitchFamily="49" charset="0"/>
+              </a:rPr>
+              <a:t>ast</a:t>
+            </a:r>
+            <a:r>
+              <a:rPr lang="en-US"/>
+              <a:t>.</a:t>
+            </a:r>
+            <a:endParaRPr lang="en-US" dirty="0"/>
           </a:p>
         </p:txBody>
       </p:sp>

--- a/PowerPoints/08 - Abstract Syntax Trees.pptx
+++ b/PowerPoints/08 - Abstract Syntax Trees.pptx
@@ -48,7 +48,7 @@
     <p:sldId id="333" r:id="rId36"/>
     <p:sldId id="311" r:id="rId37"/>
     <p:sldId id="368" r:id="rId38"/>
-    <p:sldId id="312" r:id="rId39"/>
+    <p:sldId id="383" r:id="rId39"/>
     <p:sldId id="313" r:id="rId40"/>
     <p:sldId id="365" r:id="rId41"/>
     <p:sldId id="326" r:id="rId42"/>
@@ -7962,31 +7962,18 @@
           <a:p>
             <a:r>
               <a:rPr lang="en-US" dirty="0"/>
-              <a:t>All AST classes will be defined in package </a:t>
+              <a:t>All AST classes will be defined in package “</a:t>
             </a:r>
             <a:r>
               <a:rPr lang="en-US" dirty="0" err="1">
                 <a:latin typeface="Consolas" pitchFamily="49" charset="0"/>
               </a:rPr>
-              <a:t>edu.citadel.cprl</a:t>
-            </a:r>
-            <a:r>
-              <a:rPr lang="en-US" err="1">
-                <a:latin typeface="Consolas" pitchFamily="49" charset="0"/>
-              </a:rPr>
-              <a:t>.</a:t>
-            </a:r>
-            <a:r>
-              <a:rPr lang="en-US">
-                <a:latin typeface="Consolas" pitchFamily="49" charset="0"/>
-              </a:rPr>
-              <a:t>ast</a:t>
-            </a:r>
-            <a:r>
-              <a:rPr lang="en-US"/>
-              <a:t>.</a:t>
-            </a:r>
-            <a:endParaRPr lang="en-US" dirty="0"/>
+              <a:t>edu.citadel.cprl.ast</a:t>
+            </a:r>
+            <a:r>
+              <a:rPr lang="en-US" dirty="0"/>
+              <a:t>”.</a:t>
+            </a:r>
           </a:p>
         </p:txBody>
       </p:sp>
@@ -8296,7 +8283,7 @@
               <a:rPr lang="en-US" sz="1800" dirty="0">
                 <a:latin typeface="Consolas" pitchFamily="49" charset="0"/>
               </a:rPr>
-              <a:t>()</a:t>
+              <a:t>() ...</a:t>
             </a:r>
           </a:p>
           <a:p>
@@ -8368,7 +8355,7 @@
               <a:rPr lang="en-US" sz="1800" dirty="0">
                 <a:latin typeface="Consolas" pitchFamily="49" charset="0"/>
               </a:rPr>
-              <a:t>    abstract fun emit()</a:t>
+              <a:t>    abstract fun emit() ...</a:t>
             </a:r>
           </a:p>
           <a:p>
@@ -13085,17 +13072,21 @@
             <a:pPr algn="l"/>
             <a:r>
               <a:rPr lang="en-US" sz="2000" dirty="0"/>
-              <a:t>three values – GLOBAL, </a:t>
-            </a:r>
-            <a:r>
-              <a:rPr lang="en-US" sz="2000" dirty="0">
+              <a:t>three values – GLOBAL</a:t>
+            </a:r>
+            <a:r>
+              <a:rPr lang="en-US" sz="2000"/>
+              <a:t>, </a:t>
+            </a:r>
+            <a:r>
+              <a:rPr lang="en-US" sz="2000">
                 <a:latin typeface="Consolas" panose="020B0609020204030204" pitchFamily="49" charset="0"/>
               </a:rPr>
               <a:t>LOCAL</a:t>
             </a:r>
             <a:r>
-              <a:rPr lang="en-US" sz="2000" dirty="0"/>
-              <a:t> and </a:t>
+              <a:rPr lang="en-US" sz="2000"/>
+              <a:t>, and </a:t>
             </a:r>
             <a:r>
               <a:rPr lang="en-US" sz="2000" dirty="0">
@@ -19265,13 +19256,13 @@
           <a:p>
             <a:r>
               <a:rPr lang="en-US" dirty="0"/>
-              <a:t>When an identifier is encountered in a context other than its declaration (e.g., as part of an expression or subprogram call), the parser will check that the identifier has been declared.</a:t>
-            </a:r>
-          </a:p>
-          <a:p>
-            <a:r>
-              <a:rPr lang="en-US" dirty="0"/>
-              <a:t>The parser will then use the information about how the identifier was declared to facilitate correct parsing (e.g., you can’t assign a value to an identifier that was declared as a constant).</a:t>
+              <a:t>When an identifier is encountered in a context other than its declaration (e.g., as part of an expression or subprogram call), the parser will check to see if the identifier has been declared.</a:t>
+            </a:r>
+          </a:p>
+          <a:p>
+            <a:r>
+              <a:rPr lang="en-US" dirty="0"/>
+              <a:t>If it has, the parser will then use the information about how the identifier was declared to facilitate correct parsing (e.g., you can’t assign a value to an identifier that was declared as a constant).</a:t>
             </a:r>
           </a:p>
         </p:txBody>
@@ -19279,7 +19270,7 @@
     </p:spTree>
     <p:extLst>
       <p:ext uri="{BB962C8B-B14F-4D97-AF65-F5344CB8AC3E}">
-        <p14:creationId xmlns:p14="http://schemas.microsoft.com/office/powerpoint/2010/main" val="338823142"/>
+        <p14:creationId xmlns:p14="http://schemas.microsoft.com/office/powerpoint/2010/main" val="3913902771"/>
       </p:ext>
     </p:extLst>
   </p:cSld>
@@ -24499,7 +24490,25 @@
             <a:pPr lvl="1"/>
             <a:r>
               <a:rPr lang="en-US" dirty="0"/>
-              <a:t>do not correspond to the edges of the “tree”.</a:t>
+              <a:t>do not correspond to the edges of the “tree”</a:t>
+            </a:r>
+          </a:p>
+          <a:p>
+            <a:pPr lvl="1"/>
+            <a:r>
+              <a:rPr lang="en-US"/>
+              <a:t>assist with constraint analysis and/or code generation but are</a:t>
+            </a:r>
+            <a:br>
+              <a:rPr lang="en-US"/>
+            </a:br>
+            <a:r>
+              <a:rPr lang="en-US"/>
+              <a:t>not </a:t>
+            </a:r>
+            <a:r>
+              <a:rPr lang="en-US" dirty="0"/>
+              <a:t>suggested or motivated by the context-free grammar</a:t>
             </a:r>
           </a:p>
           <a:p>
@@ -28245,7 +28254,15 @@
           <a:p>
             <a:r>
               <a:rPr lang="en-US" dirty="0"/>
-              <a:t>Once a loop statement has been parsed, we don’t need to retain the terminal symbols.  The AST for a loop statement would contain only the statements in the body of the loop and the optional boolean expression (e.g., the reference to the boolean expression could be null).</a:t>
+              <a:t>Once a loop statement has been parsed, we don’t need to retain the terminal symbols.  The AST for a loop statement would contain only </a:t>
+            </a:r>
+            <a:r>
+              <a:rPr lang="en-US"/>
+              <a:t>the statement </a:t>
+            </a:r>
+            <a:r>
+              <a:rPr lang="en-US" dirty="0"/>
+              <a:t>in the body of the loop and the optional boolean expression (e.g., the reference to the boolean expression could be null).</a:t>
             </a:r>
           </a:p>
           <a:p>
